--- a/docs/Socratic AI Proposal Defence.pptx
+++ b/docs/Socratic AI Proposal Defence.pptx
@@ -3192,7 +3192,7 @@
                 <a:ea typeface="Arial" pitchFamily="34" charset="-122"/>
                 <a:cs typeface="Arial" pitchFamily="34" charset="-120"/>
               </a:rPr>
-              <a:t>Presented by : Eusoff Amir  ([Student ID])</a:t>
+              <a:t>Presented by : Muhammad Eusoff Amir bin Hazri (22010491)</a:t>
             </a:r>
             <a:endParaRPr lang="en-US" sz="1500" dirty="0"/>
           </a:p>

--- a/docs/Socratic AI Proposal Defence.pptx
+++ b/docs/Socratic AI Proposal Defence.pptx
@@ -3252,7 +3252,7 @@
                 <a:ea typeface="Arial" pitchFamily="34" charset="-122"/>
                 <a:cs typeface="Arial" pitchFamily="34" charset="-120"/>
               </a:rPr>
-              <a:t>Course : [Course code] Final Year Project I</a:t>
+              <a:t>Course : EFB4042 Final Year Project I</a:t>
             </a:r>
             <a:endParaRPr lang="en-US" sz="1500" dirty="0"/>
           </a:p>

--- a/docs/Socratic AI Proposal Defence.pptx
+++ b/docs/Socratic AI Proposal Defence.pptx
@@ -1662,7 +1662,7 @@
           <a:p>
             <a:r>
               <a:rPr lang="en-US" dirty="0"/>
-              <a:t>To conclude. AI makes it easy to skip thinking, and current tutors have no structure or real assessment. I built a working multi-agent tutor that follows the six levels, marks the nine standards and is guarded by code. Next I will show which type of reasoning and knowledge a learner used, and validate the marks against human markers. The take-home message: it is a reasoning trainer, not an answer machine, built in a new way with many agents working together.</a:t>
+              <a:t>To conclude. Current tutors have no question ladder and no real assessment. Socratic AI follows the six levels, marks the nine standards and never gives the answer away. Next, it will show which type of reasoning and knowledge a learner used, checked against human markers. It is a reasoning trainer, not an answer machine.</a:t>
             </a:r>
             <a:endParaRPr lang="en-US" dirty="0"/>
           </a:p>
@@ -11571,12 +11571,12 @@
         </p:nvSpPr>
         <p:spPr>
           <a:xfrm>
-            <a:off x="914400" y="1280160"/>
-            <a:ext cx="10362895" cy="3383280"/>
+            <a:off x="914400" y="1371600"/>
+            <a:ext cx="10362895" cy="2468880"/>
           </a:xfrm>
           <a:prstGeom prst="roundRect">
             <a:avLst>
-              <a:gd name="adj" fmla="val 2703"/>
+              <a:gd name="adj" fmla="val 3704"/>
             </a:avLst>
           </a:prstGeom>
           <a:solidFill>
@@ -11598,8 +11598,8 @@
         </p:nvSpPr>
         <p:spPr>
           <a:xfrm>
-            <a:off x="1234440" y="1371600"/>
-            <a:ext cx="9722815" cy="3200400"/>
+            <a:off x="1234440" y="1463040"/>
+            <a:ext cx="9722815" cy="2286000"/>
           </a:xfrm>
           <a:prstGeom prst="rect">
             <a:avLst/>
@@ -11615,7 +11615,7 @@
               <a:buNone/>
             </a:pPr>
             <a:r>
-              <a:rPr lang="en-US" sz="1700" dirty="0">
+              <a:rPr lang="en-US" sz="2000" dirty="0">
                 <a:solidFill>
                   <a:srgbClr val="111827"/>
                 </a:solidFill>
@@ -11623,9 +11623,9 @@
                 <a:ea typeface="Arial" pitchFamily="34" charset="-122"/>
                 <a:cs typeface="Arial" pitchFamily="34" charset="-120"/>
               </a:rPr>
-              <a:t>Generative AI makes it easy to skip thinking, and existing Socratic tutors have no structured question ladder, no assessment against a framework and no clear session. This project has built Socratic AI, a working multi-agent tutor that follows Paul's six question levels, marks every answer against the nine intellectual standards, and uses plain-code rules to guard every AI decision. First tests show it never gives the answer away and ends every session with a learner profile. The next stage shows which type of reasoning and knowledge a learner used, measured over many questions, and validates the Assessor against human markers.</a:t>
-            </a:r>
-            <a:endParaRPr lang="en-US" sz="1700" dirty="0"/>
+              <a:t>Existing Socratic AI tutors have no question ladder and no real assessment. Socratic AI is a working multi-agent tutor that follows Paul's six levels, marks every answer against the nine standards, and never gives the answer away. Next, it will show which type of reasoning and knowledge a learner used, and be checked against human markers.</a:t>
+            </a:r>
+            <a:endParaRPr lang="en-US" sz="2000" dirty="0"/>
           </a:p>
         </p:txBody>
       </p:sp>
@@ -11637,7 +11637,7 @@
         </p:nvSpPr>
         <p:spPr>
           <a:xfrm>
-            <a:off x="914400" y="4983480"/>
+            <a:off x="914400" y="4343400"/>
             <a:ext cx="10362895" cy="365760"/>
           </a:xfrm>
           <a:prstGeom prst="rect">
@@ -11676,8 +11676,8 @@
         </p:nvSpPr>
         <p:spPr>
           <a:xfrm>
-            <a:off x="914400" y="5349240"/>
-            <a:ext cx="10362895" cy="731520"/>
+            <a:off x="914400" y="4754880"/>
+            <a:ext cx="10362895" cy="822960"/>
           </a:xfrm>
           <a:prstGeom prst="rect">
             <a:avLst/>
@@ -11693,7 +11693,7 @@
               <a:buNone/>
             </a:pPr>
             <a:r>
-              <a:rPr lang="en-US" sz="1700" b="1" dirty="0">
+              <a:rPr lang="en-US" sz="1900" b="1" dirty="0">
                 <a:solidFill>
                   <a:srgbClr val="07517A"/>
                 </a:solidFill>
@@ -11703,7 +11703,7 @@
               </a:rPr>
               <a:t>This is a reasoning trainer, not an answer machine, built in a new way: many prompted agents working together, guarded by code.</a:t>
             </a:r>
-            <a:endParaRPr lang="en-US" sz="1700" dirty="0"/>
+            <a:endParaRPr lang="en-US" sz="1900" dirty="0"/>
           </a:p>
         </p:txBody>
       </p:sp>
